--- a/StudyTracker_Presentation  -  Repaired.pptx
+++ b/StudyTracker_Presentation  -  Repaired.pptx
@@ -144,7 +144,7 @@
     </p:spTree>
     <p:extLst>
       <p:ext uri="{BB962C8B-B14F-4D97-AF65-F5344CB8AC3E}">
-        <p14:creationId xmlns:p14="http://schemas.microsoft.com/office/powerpoint/2010/main" val="3792467817"/>
+        <p14:creationId xmlns:p14="http://schemas.microsoft.com/office/powerpoint/2010/main" val="731831848"/>
       </p:ext>
     </p:extLst>
   </p:cSld>
